--- a/assets/powerpoints/module-n1-inscription/B1-quel-est-votre-nom.pptx
+++ b/assets/powerpoints/module-n1-inscription/B1-quel-est-votre-nom.pptx
@@ -11182,7 +11182,97 @@
                 </a:solidFill>
                 <a:latin typeface="Verdana"/>
               </a:rPr>
-              <a:t>Elle revient à chaque case : « &lt;b&gt;quel&lt;/b&gt; est votre nom de famille ? », « &lt;b&gt;quel&lt;/b&gt; est votre prénom ? », « &lt;b&gt;quelle&lt;/b&gt; est votre adresse ? ». À l'oreille, &lt;b&gt;quel&lt;/b&gt; et &lt;b&gt;quelle&lt;/b&gt; se disent exactement pareil : vous n'avez rien à choisir en parlant.</a:t>
+              <a:t>Elle revient à chaque case : « </a:t>
+            </a:r>
+            <a:r>
+              <a:rPr sz="2000" b="1" i="0">
+                <a:solidFill>
+                  <a:srgbClr val="4B4F52"/>
+                </a:solidFill>
+                <a:latin typeface="Verdana"/>
+              </a:rPr>
+              <a:t>quel</a:t>
+            </a:r>
+            <a:r>
+              <a:rPr sz="2000" b="0" i="0">
+                <a:solidFill>
+                  <a:srgbClr val="4B4F52"/>
+                </a:solidFill>
+                <a:latin typeface="Verdana"/>
+              </a:rPr>
+              <a:t> est votre nom de famille ? », « </a:t>
+            </a:r>
+            <a:r>
+              <a:rPr sz="2000" b="1" i="0">
+                <a:solidFill>
+                  <a:srgbClr val="4B4F52"/>
+                </a:solidFill>
+                <a:latin typeface="Verdana"/>
+              </a:rPr>
+              <a:t>quel</a:t>
+            </a:r>
+            <a:r>
+              <a:rPr sz="2000" b="0" i="0">
+                <a:solidFill>
+                  <a:srgbClr val="4B4F52"/>
+                </a:solidFill>
+                <a:latin typeface="Verdana"/>
+              </a:rPr>
+              <a:t> est votre prénom ? », « </a:t>
+            </a:r>
+            <a:r>
+              <a:rPr sz="2000" b="1" i="0">
+                <a:solidFill>
+                  <a:srgbClr val="4B4F52"/>
+                </a:solidFill>
+                <a:latin typeface="Verdana"/>
+              </a:rPr>
+              <a:t>quelle</a:t>
+            </a:r>
+            <a:r>
+              <a:rPr sz="2000" b="0" i="0">
+                <a:solidFill>
+                  <a:srgbClr val="4B4F52"/>
+                </a:solidFill>
+                <a:latin typeface="Verdana"/>
+              </a:rPr>
+              <a:t> est votre adresse ? ». À l'oreille, </a:t>
+            </a:r>
+            <a:r>
+              <a:rPr sz="2000" b="1" i="0">
+                <a:solidFill>
+                  <a:srgbClr val="4B4F52"/>
+                </a:solidFill>
+                <a:latin typeface="Verdana"/>
+              </a:rPr>
+              <a:t>quel</a:t>
+            </a:r>
+            <a:r>
+              <a:rPr sz="2000" b="0" i="0">
+                <a:solidFill>
+                  <a:srgbClr val="4B4F52"/>
+                </a:solidFill>
+                <a:latin typeface="Verdana"/>
+              </a:rPr>
+              <a:t> et </a:t>
+            </a:r>
+            <a:r>
+              <a:rPr sz="2000" b="1" i="0">
+                <a:solidFill>
+                  <a:srgbClr val="4B4F52"/>
+                </a:solidFill>
+                <a:latin typeface="Verdana"/>
+              </a:rPr>
+              <a:t>quelle</a:t>
+            </a:r>
+            <a:r>
+              <a:rPr sz="2000" b="0" i="0">
+                <a:solidFill>
+                  <a:srgbClr val="4B4F52"/>
+                </a:solidFill>
+                <a:latin typeface="Verdana"/>
+              </a:rPr>
+              <a:t> se disent exactement pareil : vous n'avez rien à choisir en parlant.</a:t>
             </a:r>
           </a:p>
         </p:txBody>
